--- a/schools-presentations/A Gymnasiou/A5.3 Μ2 - Κίνδυνοι στο Διαδίκτυο.pptx
+++ b/schools-presentations/A Gymnasiou/A5.3 Μ2 - Κίνδυνοι στο Διαδίκτυο.pptx
@@ -5,7 +5,7 @@
     <p:sldMasterId id="2147483648" r:id="rId1"/>
   </p:sldMasterIdLst>
   <p:notesMasterIdLst>
-    <p:notesMasterId r:id="rId12"/>
+    <p:notesMasterId r:id="rId11"/>
   </p:notesMasterIdLst>
   <p:sldIdLst>
     <p:sldId id="256" r:id="rId2"/>
@@ -17,7 +17,6 @@
     <p:sldId id="262" r:id="rId8"/>
     <p:sldId id="263" r:id="rId9"/>
     <p:sldId id="264" r:id="rId10"/>
-    <p:sldId id="265" r:id="rId11"/>
   </p:sldIdLst>
   <p:sldSz cx="12192000" cy="6858000"/>
   <p:notesSz cx="6858000" cy="9144000"/>
@@ -116,23 +115,20 @@
       </a:defRPr>
     </a:lvl9pPr>
   </p:defaultTextStyle>
+  <p:extLst>
+    <p:ext uri="{EFAFB233-063F-42B5-8137-9DF3F51BA10A}">
+      <p15:sldGuideLst xmlns:p15="http://schemas.microsoft.com/office/powerpoint/2012/main"/>
+    </p:ext>
+  </p:extLst>
 </p:presentation>
-</file>
-
-<file path=ppt/revisionInfo.xml><?xml version="1.0" encoding="utf-8"?>
-<p1510:revInfo xmlns:a="http://schemas.openxmlformats.org/drawingml/2006/main" xmlns:r="http://schemas.openxmlformats.org/officeDocument/2006/relationships" xmlns:p1510="http://schemas.microsoft.com/office/powerpoint/2015/10/main">
-  <p1510:revLst>
-    <p1510:client id="{FD86457C-2143-4EBE-96DE-2A21C9AD82B3}" v="1" dt="2026-10-24T05:13:00.156"/>
-  </p1510:revLst>
-</p1510:revInfo>
 </file>
 
 <file path=ppt/changesInfos/changesInfo1.xml><?xml version="1.0" encoding="utf-8"?>
 <pc:chgInfo xmlns:a="http://schemas.openxmlformats.org/drawingml/2006/main" xmlns:r="http://schemas.openxmlformats.org/officeDocument/2006/relationships" xmlns:ac="http://schemas.microsoft.com/office/drawing/2013/main/command" xmlns:pc="http://schemas.microsoft.com/office/powerpoint/2013/main/command">
   <pc:docChgLst>
     <pc:chgData name="Άριστος Αρέστη" userId="813aa191-2d4c-464f-9d05-0a7e494d859f" providerId="ADAL" clId="{49C7B61D-1ACF-4AFF-A04E-A3B433E32474}"/>
-    <pc:docChg chg="custSel modSld">
-      <pc:chgData name="Άριστος Αρέστη" userId="813aa191-2d4c-464f-9d05-0a7e494d859f" providerId="ADAL" clId="{49C7B61D-1ACF-4AFF-A04E-A3B433E32474}" dt="2026-10-24T05:40:04.746" v="67" actId="14100"/>
+    <pc:docChg chg="custSel delSld modSld">
+      <pc:chgData name="Άριστος Αρέστη" userId="813aa191-2d4c-464f-9d05-0a7e494d859f" providerId="ADAL" clId="{49C7B61D-1ACF-4AFF-A04E-A3B433E32474}" dt="2026-10-29T14:59:45.343" v="68" actId="47"/>
       <pc:docMkLst>
         <pc:docMk/>
       </pc:docMkLst>
@@ -179,14 +175,6 @@
             <pc:docMk/>
             <pc:sldMk cId="961205622" sldId="258"/>
             <ac:spMk id="8" creationId="{FFBB6C08-C140-4637-83A0-AFBE5C4B9266}"/>
-          </ac:spMkLst>
-        </pc:spChg>
-        <pc:spChg chg="add del mod">
-          <ac:chgData name="Άριστος Αρέστη" userId="813aa191-2d4c-464f-9d05-0a7e494d859f" providerId="ADAL" clId="{49C7B61D-1ACF-4AFF-A04E-A3B433E32474}" dt="2026-10-24T05:13:49.025" v="53"/>
-          <ac:spMkLst>
-            <pc:docMk/>
-            <pc:sldMk cId="961205622" sldId="258"/>
-            <ac:spMk id="10" creationId="{6C3CC270-B28E-A42C-6214-9E04AAA354D1}"/>
           </ac:spMkLst>
         </pc:spChg>
       </pc:sldChg>
@@ -293,28 +281,12 @@
           </ac:picMkLst>
         </pc:picChg>
       </pc:sldChg>
-      <pc:sldChg chg="modSp mod">
-        <pc:chgData name="Άριστος Αρέστη" userId="813aa191-2d4c-464f-9d05-0a7e494d859f" providerId="ADAL" clId="{49C7B61D-1ACF-4AFF-A04E-A3B433E32474}" dt="2026-10-24T05:13:00.183" v="8" actId="27636"/>
+      <pc:sldChg chg="modSp del mod">
+        <pc:chgData name="Άριστος Αρέστη" userId="813aa191-2d4c-464f-9d05-0a7e494d859f" providerId="ADAL" clId="{49C7B61D-1ACF-4AFF-A04E-A3B433E32474}" dt="2026-10-29T14:59:45.343" v="68" actId="47"/>
         <pc:sldMkLst>
           <pc:docMk/>
           <pc:sldMk cId="1164157584" sldId="265"/>
         </pc:sldMkLst>
-        <pc:spChg chg="mod">
-          <ac:chgData name="Άριστος Αρέστη" userId="813aa191-2d4c-464f-9d05-0a7e494d859f" providerId="ADAL" clId="{49C7B61D-1ACF-4AFF-A04E-A3B433E32474}" dt="2026-10-24T05:13:00.183" v="8" actId="27636"/>
-          <ac:spMkLst>
-            <pc:docMk/>
-            <pc:sldMk cId="1164157584" sldId="265"/>
-            <ac:spMk id="11" creationId="{DA9E55C7-E51D-4311-A2A4-C857D5C55A80}"/>
-          </ac:spMkLst>
-        </pc:spChg>
-        <pc:spChg chg="mod">
-          <ac:chgData name="Άριστος Αρέστη" userId="813aa191-2d4c-464f-9d05-0a7e494d859f" providerId="ADAL" clId="{49C7B61D-1ACF-4AFF-A04E-A3B433E32474}" dt="2026-10-24T05:13:00.183" v="7" actId="27636"/>
-          <ac:spMkLst>
-            <pc:docMk/>
-            <pc:sldMk cId="1164157584" sldId="265"/>
-            <ac:spMk id="14" creationId="{24AE2ECD-FFF4-4B4D-9D67-4F80C7174392}"/>
-          </ac:spMkLst>
-        </pc:spChg>
       </pc:sldChg>
     </pc:docChg>
   </pc:docChgLst>
@@ -493,83 +465,6 @@
 </file>
 
 <file path=ppt/notesSlides/notesSlide1.xml><?xml version="1.0" encoding="utf-8"?>
-<p:notes xmlns:a="http://schemas.openxmlformats.org/drawingml/2006/main" xmlns:r="http://schemas.openxmlformats.org/officeDocument/2006/relationships" xmlns:p="http://schemas.openxmlformats.org/presentationml/2006/main">
-  <p:cSld>
-    <p:spTree>
-      <p:nvGrpSpPr>
-        <p:cNvPr id="1" name=""/>
-        <p:cNvGrpSpPr/>
-        <p:nvPr/>
-      </p:nvGrpSpPr>
-      <p:grpSpPr>
-        <a:xfrm>
-          <a:off x="0" y="0"/>
-          <a:ext cx="0" cy="0"/>
-          <a:chOff x="0" y="0"/>
-          <a:chExt cx="0" cy="0"/>
-        </a:xfrm>
-      </p:grpSpPr>
-      <p:sp>
-        <p:nvSpPr>
-          <p:cNvPr id="2" name="Slide Image Placeholder 1"/>
-          <p:cNvSpPr>
-            <a:spLocks noGrp="1" noRot="1" noChangeAspect="1"/>
-          </p:cNvSpPr>
-          <p:nvPr>
-            <p:ph type="sldImg"/>
-          </p:nvPr>
-        </p:nvSpPr>
-        <p:spPr/>
-      </p:sp>
-      <p:sp>
-        <p:nvSpPr>
-          <p:cNvPr id="3" name="Notes Placeholder 2"/>
-          <p:cNvSpPr>
-            <a:spLocks noGrp="1"/>
-          </p:cNvSpPr>
-          <p:nvPr>
-            <p:ph type="body" idx="1"/>
-          </p:nvPr>
-        </p:nvSpPr>
-        <p:spPr/>
-        <p:txBody>
-          <a:bodyPr/>
-          <a:lstStyle/>
-          <a:p>
-            <a:r>
-              <a:t>Πηγές: σχολικό βιβλίο θεωρίας και Φύλλα Εργασίας Πληροφορικής Α΄ Γυμνασίου, ενότητα Α.5.3.Μ2. Πρότυπο μορφοποίησης: A1Μ1 Εισαγωγή στις Βασικές Έννοιες.pptx.</a:t>
-            </a:r>
-          </a:p>
-        </p:txBody>
-      </p:sp>
-      <p:sp>
-        <p:nvSpPr>
-          <p:cNvPr id="4" name="Slide Number Placeholder 3"/>
-          <p:cNvSpPr>
-            <a:spLocks noGrp="1"/>
-          </p:cNvSpPr>
-          <p:nvPr>
-            <p:ph type="sldNum" idx="5"/>
-          </p:nvPr>
-        </p:nvSpPr>
-        <p:spPr/>
-        <p:txBody>
-          <a:bodyPr/>
-          <a:lstStyle/>
-          <a:p>
-            <a:endParaRPr/>
-          </a:p>
-        </p:txBody>
-      </p:sp>
-    </p:spTree>
-  </p:cSld>
-  <p:clrMapOvr>
-    <a:masterClrMapping/>
-  </p:clrMapOvr>
-</p:notes>
-</file>
-
-<file path=ppt/notesSlides/notesSlide10.xml><?xml version="1.0" encoding="utf-8"?>
 <p:notes xmlns:a="http://schemas.openxmlformats.org/drawingml/2006/main" xmlns:r="http://schemas.openxmlformats.org/officeDocument/2006/relationships" xmlns:p="http://schemas.openxmlformats.org/presentationml/2006/main">
   <p:cSld>
     <p:spTree>
@@ -3609,878 +3504,6 @@
     <p:extLst>
       <p:ext uri="{BB962C8B-B14F-4D97-AF65-F5344CB8AC3E}">
         <p14:creationId xmlns:p14="http://schemas.microsoft.com/office/powerpoint/2010/main" val="206329702"/>
-      </p:ext>
-    </p:extLst>
-  </p:cSld>
-  <p:clrMapOvr>
-    <a:masterClrMapping/>
-  </p:clrMapOvr>
-</p:sld>
-</file>
-
-<file path=ppt/slides/slide10.xml><?xml version="1.0" encoding="utf-8"?>
-<p:sld xmlns:a="http://schemas.openxmlformats.org/drawingml/2006/main" xmlns:r="http://schemas.openxmlformats.org/officeDocument/2006/relationships" xmlns:p="http://schemas.openxmlformats.org/presentationml/2006/main">
-  <p:cSld>
-    <p:spTree>
-      <p:nvGrpSpPr>
-        <p:cNvPr id="1" name=""/>
-        <p:cNvGrpSpPr/>
-        <p:nvPr/>
-      </p:nvGrpSpPr>
-      <p:grpSpPr>
-        <a:xfrm>
-          <a:off x="0" y="0"/>
-          <a:ext cx="0" cy="0"/>
-          <a:chOff x="0" y="0"/>
-          <a:chExt cx="0" cy="0"/>
-        </a:xfrm>
-      </p:grpSpPr>
-      <p:sp>
-        <p:nvSpPr>
-          <p:cNvPr id="18" name="Rectangle 17">
-            <a:extLst>
-              <a:ext uri="{FF2B5EF4-FFF2-40B4-BE49-F238E27FC236}">
-                <a16:creationId xmlns:a16="http://schemas.microsoft.com/office/drawing/2014/main" id="{C18EA252-B285-454A-A3FD-C17A797207A4}"/>
-              </a:ext>
-            </a:extLst>
-          </p:cNvPr>
-          <p:cNvSpPr>
-            <a:spLocks noGrp="1"/>
-          </p:cNvSpPr>
-          <p:nvPr/>
-        </p:nvSpPr>
-        <p:spPr>
-          <a:xfrm>
-            <a:off x="666750" y="400050"/>
-            <a:ext cx="10858500" cy="685800"/>
-          </a:xfrm>
-          <a:prstGeom prst="rect">
-            <a:avLst/>
-          </a:prstGeom>
-          <a:noFill/>
-          <a:ln w="0">
-            <a:noFill/>
-          </a:ln>
-        </p:spPr>
-        <p:txBody>
-          <a:bodyPr lIns="38100" tIns="19050" rIns="38100" bIns="19050" anchor="t">
-            <a:normAutofit/>
-          </a:bodyPr>
-          <a:lstStyle/>
-          <a:p>
-            <a:pPr algn="l">
-              <a:defRPr sz="2925" b="1">
-                <a:solidFill>
-                  <a:srgbClr val="151515"/>
-                </a:solidFill>
-                <a:latin typeface="Inter"/>
-                <a:ea typeface="Inter"/>
-                <a:cs typeface="Inter"/>
-              </a:defRPr>
-            </a:pPr>
-            <a:r>
-              <a:rPr sz="2925" b="1">
-                <a:solidFill>
-                  <a:srgbClr val="151515"/>
-                </a:solidFill>
-                <a:latin typeface="Inter"/>
-                <a:ea typeface="Inter"/>
-                <a:cs typeface="Inter"/>
-              </a:rPr>
-              <a:t>Ερωτήσεις του Φύλλου Εργασίας</a:t>
-            </a:r>
-          </a:p>
-        </p:txBody>
-      </p:sp>
-      <p:sp>
-        <p:nvSpPr>
-          <p:cNvPr id="2" name="Rectangle 1">
-            <a:extLst>
-              <a:ext uri="{FF2B5EF4-FFF2-40B4-BE49-F238E27FC236}">
-                <a16:creationId xmlns:a16="http://schemas.microsoft.com/office/drawing/2014/main" id="{0D8CABFC-FB34-4E5B-995D-20F641BA56EB}"/>
-              </a:ext>
-            </a:extLst>
-          </p:cNvPr>
-          <p:cNvSpPr>
-            <a:spLocks noGrp="1"/>
-          </p:cNvSpPr>
-          <p:nvPr/>
-        </p:nvSpPr>
-        <p:spPr>
-          <a:xfrm>
-            <a:off x="666750" y="1190625"/>
-            <a:ext cx="10858500" cy="28575"/>
-          </a:xfrm>
-          <a:prstGeom prst="rect">
-            <a:avLst/>
-          </a:prstGeom>
-          <a:solidFill>
-            <a:srgbClr val="9B9B9B"/>
-          </a:solidFill>
-          <a:ln w="0">
-            <a:noFill/>
-          </a:ln>
-        </p:spPr>
-        <p:txBody>
-          <a:bodyPr/>
-          <a:lstStyle/>
-          <a:p>
-            <a:endParaRPr lang="en-GB"/>
-          </a:p>
-        </p:txBody>
-      </p:sp>
-      <p:sp>
-        <p:nvSpPr>
-          <p:cNvPr id="3" name="Rectangle 2">
-            <a:extLst>
-              <a:ext uri="{FF2B5EF4-FFF2-40B4-BE49-F238E27FC236}">
-                <a16:creationId xmlns:a16="http://schemas.microsoft.com/office/drawing/2014/main" id="{43A30C87-9CD8-4DA6-A416-DF077A88A8E5}"/>
-              </a:ext>
-            </a:extLst>
-          </p:cNvPr>
-          <p:cNvSpPr>
-            <a:spLocks noGrp="1"/>
-          </p:cNvSpPr>
-          <p:nvPr/>
-        </p:nvSpPr>
-        <p:spPr>
-          <a:xfrm>
-            <a:off x="714375" y="1476375"/>
-            <a:ext cx="7239000" cy="428625"/>
-          </a:xfrm>
-          <a:prstGeom prst="rect">
-            <a:avLst/>
-          </a:prstGeom>
-          <a:noFill/>
-          <a:ln w="0">
-            <a:noFill/>
-          </a:ln>
-        </p:spPr>
-        <p:txBody>
-          <a:bodyPr lIns="38100" tIns="19050" rIns="38100" bIns="19050" anchor="t">
-            <a:normAutofit/>
-          </a:bodyPr>
-          <a:lstStyle/>
-          <a:p>
-            <a:pPr algn="l">
-              <a:defRPr sz="1800" b="1">
-                <a:solidFill>
-                  <a:srgbClr val="151515"/>
-                </a:solidFill>
-                <a:latin typeface="Inter"/>
-                <a:ea typeface="Inter"/>
-                <a:cs typeface="Inter"/>
-              </a:defRPr>
-            </a:pPr>
-            <a:r>
-              <a:rPr sz="1800" b="1">
-                <a:solidFill>
-                  <a:srgbClr val="151515"/>
-                </a:solidFill>
-                <a:latin typeface="Inter"/>
-                <a:ea typeface="Inter"/>
-                <a:cs typeface="Inter"/>
-              </a:rPr>
-              <a:t>Η θεωρία καλύπτει τις δραστηριότητες του Α.5.3.Μ2:</a:t>
-            </a:r>
-          </a:p>
-        </p:txBody>
-      </p:sp>
-      <p:sp>
-        <p:nvSpPr>
-          <p:cNvPr id="4" name="Rectangle: Rounded Corners 3">
-            <a:extLst>
-              <a:ext uri="{FF2B5EF4-FFF2-40B4-BE49-F238E27FC236}">
-                <a16:creationId xmlns:a16="http://schemas.microsoft.com/office/drawing/2014/main" id="{DC7A6562-39DF-410F-9FA6-F9E66CA336AC}"/>
-              </a:ext>
-            </a:extLst>
-          </p:cNvPr>
-          <p:cNvSpPr>
-            <a:spLocks noGrp="1"/>
-          </p:cNvSpPr>
-          <p:nvPr/>
-        </p:nvSpPr>
-        <p:spPr>
-          <a:xfrm>
-            <a:off x="762000" y="2095500"/>
-            <a:ext cx="609600" cy="438150"/>
-          </a:xfrm>
-          <a:prstGeom prst="roundRect">
-            <a:avLst>
-              <a:gd name="adj" fmla="val 17391"/>
-            </a:avLst>
-          </a:prstGeom>
-          <a:solidFill>
-            <a:srgbClr val="F47C27"/>
-          </a:solidFill>
-          <a:ln w="0">
-            <a:noFill/>
-          </a:ln>
-        </p:spPr>
-        <p:txBody>
-          <a:bodyPr/>
-          <a:lstStyle/>
-          <a:p>
-            <a:endParaRPr lang="en-GB"/>
-          </a:p>
-        </p:txBody>
-      </p:sp>
-      <p:sp>
-        <p:nvSpPr>
-          <p:cNvPr id="5" name="Rectangle 4">
-            <a:extLst>
-              <a:ext uri="{FF2B5EF4-FFF2-40B4-BE49-F238E27FC236}">
-                <a16:creationId xmlns:a16="http://schemas.microsoft.com/office/drawing/2014/main" id="{DC6BC4B6-67BE-4D2C-A570-B84871F9CA5C}"/>
-              </a:ext>
-            </a:extLst>
-          </p:cNvPr>
-          <p:cNvSpPr>
-            <a:spLocks noGrp="1"/>
-          </p:cNvSpPr>
-          <p:nvPr/>
-        </p:nvSpPr>
-        <p:spPr>
-          <a:xfrm>
-            <a:off x="800100" y="2133600"/>
-            <a:ext cx="533400" cy="342900"/>
-          </a:xfrm>
-          <a:prstGeom prst="rect">
-            <a:avLst/>
-          </a:prstGeom>
-          <a:noFill/>
-          <a:ln w="0">
-            <a:noFill/>
-          </a:ln>
-        </p:spPr>
-        <p:txBody>
-          <a:bodyPr lIns="38100" tIns="19050" rIns="38100" bIns="19050" anchor="ctr">
-            <a:normAutofit/>
-          </a:bodyPr>
-          <a:lstStyle/>
-          <a:p>
-            <a:pPr algn="ctr">
-              <a:defRPr sz="1425" b="1">
-                <a:solidFill>
-                  <a:srgbClr val="FFFFFF"/>
-                </a:solidFill>
-                <a:latin typeface="Inter"/>
-                <a:ea typeface="Inter"/>
-                <a:cs typeface="Inter"/>
-              </a:defRPr>
-            </a:pPr>
-            <a:r>
-              <a:rPr sz="1425" b="1">
-                <a:solidFill>
-                  <a:srgbClr val="FFFFFF"/>
-                </a:solidFill>
-                <a:latin typeface="Inter"/>
-                <a:ea typeface="Inter"/>
-                <a:cs typeface="Inter"/>
-              </a:rPr>
-              <a:t>1</a:t>
-            </a:r>
-          </a:p>
-        </p:txBody>
-      </p:sp>
-      <p:sp>
-        <p:nvSpPr>
-          <p:cNvPr id="6" name="Rectangle 5">
-            <a:extLst>
-              <a:ext uri="{FF2B5EF4-FFF2-40B4-BE49-F238E27FC236}">
-                <a16:creationId xmlns:a16="http://schemas.microsoft.com/office/drawing/2014/main" id="{EE41D8F0-80E4-4DF7-8F1F-7165D4551A1B}"/>
-              </a:ext>
-            </a:extLst>
-          </p:cNvPr>
-          <p:cNvSpPr>
-            <a:spLocks noGrp="1"/>
-          </p:cNvSpPr>
-          <p:nvPr/>
-        </p:nvSpPr>
-        <p:spPr>
-          <a:xfrm>
-            <a:off x="1571625" y="2095500"/>
-            <a:ext cx="6762750" cy="457200"/>
-          </a:xfrm>
-          <a:prstGeom prst="rect">
-            <a:avLst/>
-          </a:prstGeom>
-          <a:noFill/>
-          <a:ln w="0">
-            <a:noFill/>
-          </a:ln>
-        </p:spPr>
-        <p:txBody>
-          <a:bodyPr lIns="38100" tIns="19050" rIns="38100" bIns="19050" anchor="ctr">
-            <a:normAutofit/>
-          </a:bodyPr>
-          <a:lstStyle/>
-          <a:p>
-            <a:pPr algn="l">
-              <a:defRPr sz="1425" b="0">
-                <a:solidFill>
-                  <a:srgbClr val="151515"/>
-                </a:solidFill>
-                <a:latin typeface="Inter"/>
-                <a:ea typeface="Inter"/>
-                <a:cs typeface="Inter"/>
-              </a:defRPr>
-            </a:pPr>
-            <a:r>
-              <a:rPr sz="1425" b="0">
-                <a:solidFill>
-                  <a:srgbClr val="151515"/>
-                </a:solidFill>
-                <a:latin typeface="Inter"/>
-                <a:ea typeface="Inter"/>
-                <a:cs typeface="Inter"/>
-              </a:rPr>
-              <a:t>Συμπτώματα και πρόληψη εθισμού</a:t>
-            </a:r>
-          </a:p>
-        </p:txBody>
-      </p:sp>
-      <p:sp>
-        <p:nvSpPr>
-          <p:cNvPr id="7" name="Rectangle: Rounded Corners 6">
-            <a:extLst>
-              <a:ext uri="{FF2B5EF4-FFF2-40B4-BE49-F238E27FC236}">
-                <a16:creationId xmlns:a16="http://schemas.microsoft.com/office/drawing/2014/main" id="{70417A66-7E8B-430C-AE70-866F805A8BBC}"/>
-              </a:ext>
-            </a:extLst>
-          </p:cNvPr>
-          <p:cNvSpPr>
-            <a:spLocks noGrp="1"/>
-          </p:cNvSpPr>
-          <p:nvPr/>
-        </p:nvSpPr>
-        <p:spPr>
-          <a:xfrm>
-            <a:off x="762000" y="2724150"/>
-            <a:ext cx="609600" cy="438150"/>
-          </a:xfrm>
-          <a:prstGeom prst="roundRect">
-            <a:avLst>
-              <a:gd name="adj" fmla="val 17391"/>
-            </a:avLst>
-          </a:prstGeom>
-          <a:solidFill>
-            <a:srgbClr val="4B76C5"/>
-          </a:solidFill>
-          <a:ln w="0">
-            <a:noFill/>
-          </a:ln>
-        </p:spPr>
-        <p:txBody>
-          <a:bodyPr/>
-          <a:lstStyle/>
-          <a:p>
-            <a:endParaRPr lang="en-GB"/>
-          </a:p>
-        </p:txBody>
-      </p:sp>
-      <p:sp>
-        <p:nvSpPr>
-          <p:cNvPr id="8" name="Rectangle 7">
-            <a:extLst>
-              <a:ext uri="{FF2B5EF4-FFF2-40B4-BE49-F238E27FC236}">
-                <a16:creationId xmlns:a16="http://schemas.microsoft.com/office/drawing/2014/main" id="{E1F46DA1-BD23-43C8-B13B-78A78ED2BDFF}"/>
-              </a:ext>
-            </a:extLst>
-          </p:cNvPr>
-          <p:cNvSpPr>
-            <a:spLocks noGrp="1"/>
-          </p:cNvSpPr>
-          <p:nvPr/>
-        </p:nvSpPr>
-        <p:spPr>
-          <a:xfrm>
-            <a:off x="800100" y="2762250"/>
-            <a:ext cx="533400" cy="342900"/>
-          </a:xfrm>
-          <a:prstGeom prst="rect">
-            <a:avLst/>
-          </a:prstGeom>
-          <a:noFill/>
-          <a:ln w="0">
-            <a:noFill/>
-          </a:ln>
-        </p:spPr>
-        <p:txBody>
-          <a:bodyPr lIns="38100" tIns="19050" rIns="38100" bIns="19050" anchor="ctr">
-            <a:normAutofit/>
-          </a:bodyPr>
-          <a:lstStyle/>
-          <a:p>
-            <a:pPr algn="ctr">
-              <a:defRPr sz="1425" b="1">
-                <a:solidFill>
-                  <a:srgbClr val="FFFFFF"/>
-                </a:solidFill>
-                <a:latin typeface="Inter"/>
-                <a:ea typeface="Inter"/>
-                <a:cs typeface="Inter"/>
-              </a:defRPr>
-            </a:pPr>
-            <a:r>
-              <a:rPr sz="1425" b="1">
-                <a:solidFill>
-                  <a:srgbClr val="FFFFFF"/>
-                </a:solidFill>
-                <a:latin typeface="Inter"/>
-                <a:ea typeface="Inter"/>
-                <a:cs typeface="Inter"/>
-              </a:rPr>
-              <a:t>2–10</a:t>
-            </a:r>
-          </a:p>
-        </p:txBody>
-      </p:sp>
-      <p:sp>
-        <p:nvSpPr>
-          <p:cNvPr id="9" name="Rectangle 8">
-            <a:extLst>
-              <a:ext uri="{FF2B5EF4-FFF2-40B4-BE49-F238E27FC236}">
-                <a16:creationId xmlns:a16="http://schemas.microsoft.com/office/drawing/2014/main" id="{ED215535-4CA8-47E8-84DC-CD46639A3F41}"/>
-              </a:ext>
-            </a:extLst>
-          </p:cNvPr>
-          <p:cNvSpPr>
-            <a:spLocks noGrp="1"/>
-          </p:cNvSpPr>
-          <p:nvPr/>
-        </p:nvSpPr>
-        <p:spPr>
-          <a:xfrm>
-            <a:off x="1571625" y="2724150"/>
-            <a:ext cx="6762750" cy="457200"/>
-          </a:xfrm>
-          <a:prstGeom prst="rect">
-            <a:avLst/>
-          </a:prstGeom>
-          <a:noFill/>
-          <a:ln w="0">
-            <a:noFill/>
-          </a:ln>
-        </p:spPr>
-        <p:txBody>
-          <a:bodyPr lIns="38100" tIns="19050" rIns="38100" bIns="19050" anchor="ctr">
-            <a:normAutofit/>
-          </a:bodyPr>
-          <a:lstStyle/>
-          <a:p>
-            <a:pPr algn="l">
-              <a:defRPr sz="1425" b="0">
-                <a:solidFill>
-                  <a:srgbClr val="151515"/>
-                </a:solidFill>
-                <a:latin typeface="Inter"/>
-                <a:ea typeface="Inter"/>
-                <a:cs typeface="Inter"/>
-              </a:defRPr>
-            </a:pPr>
-            <a:r>
-              <a:rPr sz="1425" b="0">
-                <a:solidFill>
-                  <a:srgbClr val="151515"/>
-                </a:solidFill>
-                <a:latin typeface="Inter"/>
-                <a:ea typeface="Inter"/>
-                <a:cs typeface="Inter"/>
-              </a:rPr>
-              <a:t>Ακατάλληλο περιεχόμενο, αναφορά και PEGI</a:t>
-            </a:r>
-          </a:p>
-        </p:txBody>
-      </p:sp>
-      <p:sp>
-        <p:nvSpPr>
-          <p:cNvPr id="10" name="Rectangle: Rounded Corners 9">
-            <a:extLst>
-              <a:ext uri="{FF2B5EF4-FFF2-40B4-BE49-F238E27FC236}">
-                <a16:creationId xmlns:a16="http://schemas.microsoft.com/office/drawing/2014/main" id="{2494F476-AD7E-4FCC-BCA2-FF998595A6C7}"/>
-              </a:ext>
-            </a:extLst>
-          </p:cNvPr>
-          <p:cNvSpPr>
-            <a:spLocks noGrp="1"/>
-          </p:cNvSpPr>
-          <p:nvPr/>
-        </p:nvSpPr>
-        <p:spPr>
-          <a:xfrm>
-            <a:off x="762000" y="3352800"/>
-            <a:ext cx="609600" cy="438150"/>
-          </a:xfrm>
-          <a:prstGeom prst="roundRect">
-            <a:avLst>
-              <a:gd name="adj" fmla="val 17391"/>
-            </a:avLst>
-          </a:prstGeom>
-          <a:solidFill>
-            <a:srgbClr val="F47C27"/>
-          </a:solidFill>
-          <a:ln w="0">
-            <a:noFill/>
-          </a:ln>
-        </p:spPr>
-        <p:txBody>
-          <a:bodyPr/>
-          <a:lstStyle/>
-          <a:p>
-            <a:endParaRPr lang="en-GB"/>
-          </a:p>
-        </p:txBody>
-      </p:sp>
-      <p:sp>
-        <p:nvSpPr>
-          <p:cNvPr id="11" name="Rectangle 10">
-            <a:extLst>
-              <a:ext uri="{FF2B5EF4-FFF2-40B4-BE49-F238E27FC236}">
-                <a16:creationId xmlns:a16="http://schemas.microsoft.com/office/drawing/2014/main" id="{DA9E55C7-E51D-4311-A2A4-C857D5C55A80}"/>
-              </a:ext>
-            </a:extLst>
-          </p:cNvPr>
-          <p:cNvSpPr>
-            <a:spLocks noGrp="1"/>
-          </p:cNvSpPr>
-          <p:nvPr/>
-        </p:nvSpPr>
-        <p:spPr>
-          <a:xfrm>
-            <a:off x="800100" y="3390900"/>
-            <a:ext cx="533400" cy="342900"/>
-          </a:xfrm>
-          <a:prstGeom prst="rect">
-            <a:avLst/>
-          </a:prstGeom>
-          <a:noFill/>
-          <a:ln w="0">
-            <a:noFill/>
-          </a:ln>
-        </p:spPr>
-        <p:txBody>
-          <a:bodyPr lIns="38100" tIns="19050" rIns="38100" bIns="19050" anchor="ctr">
-            <a:normAutofit fontScale="98292"/>
-          </a:bodyPr>
-          <a:lstStyle/>
-          <a:p>
-            <a:pPr algn="ctr">
-              <a:defRPr sz="1425" b="1">
-                <a:solidFill>
-                  <a:srgbClr val="FFFFFF"/>
-                </a:solidFill>
-                <a:latin typeface="Inter"/>
-                <a:ea typeface="Inter"/>
-                <a:cs typeface="Inter"/>
-              </a:defRPr>
-            </a:pPr>
-            <a:r>
-              <a:rPr sz="1425" b="1">
-                <a:solidFill>
-                  <a:srgbClr val="FFFFFF"/>
-                </a:solidFill>
-                <a:latin typeface="Inter"/>
-                <a:ea typeface="Inter"/>
-                <a:cs typeface="Inter"/>
-              </a:rPr>
-              <a:t>11–14</a:t>
-            </a:r>
-          </a:p>
-        </p:txBody>
-      </p:sp>
-      <p:sp>
-        <p:nvSpPr>
-          <p:cNvPr id="12" name="Rectangle 11">
-            <a:extLst>
-              <a:ext uri="{FF2B5EF4-FFF2-40B4-BE49-F238E27FC236}">
-                <a16:creationId xmlns:a16="http://schemas.microsoft.com/office/drawing/2014/main" id="{454BC6A5-ACE4-4C82-AAD8-20BAE1C6A3E7}"/>
-              </a:ext>
-            </a:extLst>
-          </p:cNvPr>
-          <p:cNvSpPr>
-            <a:spLocks noGrp="1"/>
-          </p:cNvSpPr>
-          <p:nvPr/>
-        </p:nvSpPr>
-        <p:spPr>
-          <a:xfrm>
-            <a:off x="1571625" y="3352800"/>
-            <a:ext cx="6762750" cy="457200"/>
-          </a:xfrm>
-          <a:prstGeom prst="rect">
-            <a:avLst/>
-          </a:prstGeom>
-          <a:noFill/>
-          <a:ln w="0">
-            <a:noFill/>
-          </a:ln>
-        </p:spPr>
-        <p:txBody>
-          <a:bodyPr lIns="38100" tIns="19050" rIns="38100" bIns="19050" anchor="ctr">
-            <a:normAutofit/>
-          </a:bodyPr>
-          <a:lstStyle/>
-          <a:p>
-            <a:pPr algn="l">
-              <a:defRPr sz="1425" b="0">
-                <a:solidFill>
-                  <a:srgbClr val="151515"/>
-                </a:solidFill>
-                <a:latin typeface="Inter"/>
-                <a:ea typeface="Inter"/>
-                <a:cs typeface="Inter"/>
-              </a:defRPr>
-            </a:pPr>
-            <a:r>
-              <a:rPr sz="1425" b="0">
-                <a:solidFill>
-                  <a:srgbClr val="151515"/>
-                </a:solidFill>
-                <a:latin typeface="Inter"/>
-                <a:ea typeface="Inter"/>
-                <a:cs typeface="Inter"/>
-              </a:rPr>
-              <a:t>Παραπληροφόρηση και πνευματικά δικαιώματα</a:t>
-            </a:r>
-          </a:p>
-        </p:txBody>
-      </p:sp>
-      <p:sp>
-        <p:nvSpPr>
-          <p:cNvPr id="13" name="Rectangle: Rounded Corners 12">
-            <a:extLst>
-              <a:ext uri="{FF2B5EF4-FFF2-40B4-BE49-F238E27FC236}">
-                <a16:creationId xmlns:a16="http://schemas.microsoft.com/office/drawing/2014/main" id="{42BE2AF1-CBFB-4753-81AE-153130D1B54D}"/>
-              </a:ext>
-            </a:extLst>
-          </p:cNvPr>
-          <p:cNvSpPr>
-            <a:spLocks noGrp="1"/>
-          </p:cNvSpPr>
-          <p:nvPr/>
-        </p:nvSpPr>
-        <p:spPr>
-          <a:xfrm>
-            <a:off x="762000" y="3981450"/>
-            <a:ext cx="609600" cy="438150"/>
-          </a:xfrm>
-          <a:prstGeom prst="roundRect">
-            <a:avLst>
-              <a:gd name="adj" fmla="val 17391"/>
-            </a:avLst>
-          </a:prstGeom>
-          <a:solidFill>
-            <a:srgbClr val="4B76C5"/>
-          </a:solidFill>
-          <a:ln w="0">
-            <a:noFill/>
-          </a:ln>
-        </p:spPr>
-        <p:txBody>
-          <a:bodyPr/>
-          <a:lstStyle/>
-          <a:p>
-            <a:endParaRPr lang="en-GB"/>
-          </a:p>
-        </p:txBody>
-      </p:sp>
-      <p:sp>
-        <p:nvSpPr>
-          <p:cNvPr id="14" name="Rectangle 13">
-            <a:extLst>
-              <a:ext uri="{FF2B5EF4-FFF2-40B4-BE49-F238E27FC236}">
-                <a16:creationId xmlns:a16="http://schemas.microsoft.com/office/drawing/2014/main" id="{24AE2ECD-FFF4-4B4D-9D67-4F80C7174392}"/>
-              </a:ext>
-            </a:extLst>
-          </p:cNvPr>
-          <p:cNvSpPr>
-            <a:spLocks noGrp="1"/>
-          </p:cNvSpPr>
-          <p:nvPr/>
-        </p:nvSpPr>
-        <p:spPr>
-          <a:xfrm>
-            <a:off x="800100" y="4019550"/>
-            <a:ext cx="533400" cy="342900"/>
-          </a:xfrm>
-          <a:prstGeom prst="rect">
-            <a:avLst/>
-          </a:prstGeom>
-          <a:noFill/>
-          <a:ln w="0">
-            <a:noFill/>
-          </a:ln>
-        </p:spPr>
-        <p:txBody>
-          <a:bodyPr lIns="38100" tIns="19050" rIns="38100" bIns="19050" anchor="ctr">
-            <a:normAutofit fontScale="98292"/>
-          </a:bodyPr>
-          <a:lstStyle/>
-          <a:p>
-            <a:pPr algn="ctr">
-              <a:defRPr sz="1425" b="1">
-                <a:solidFill>
-                  <a:srgbClr val="FFFFFF"/>
-                </a:solidFill>
-                <a:latin typeface="Inter"/>
-                <a:ea typeface="Inter"/>
-                <a:cs typeface="Inter"/>
-              </a:defRPr>
-            </a:pPr>
-            <a:r>
-              <a:rPr sz="1425" b="1">
-                <a:solidFill>
-                  <a:srgbClr val="FFFFFF"/>
-                </a:solidFill>
-                <a:latin typeface="Inter"/>
-                <a:ea typeface="Inter"/>
-                <a:cs typeface="Inter"/>
-              </a:rPr>
-              <a:t>15–17</a:t>
-            </a:r>
-          </a:p>
-        </p:txBody>
-      </p:sp>
-      <p:sp>
-        <p:nvSpPr>
-          <p:cNvPr id="15" name="Rectangle 14">
-            <a:extLst>
-              <a:ext uri="{FF2B5EF4-FFF2-40B4-BE49-F238E27FC236}">
-                <a16:creationId xmlns:a16="http://schemas.microsoft.com/office/drawing/2014/main" id="{CFDCA8B4-D49C-42D7-964A-E25B440C1CFD}"/>
-              </a:ext>
-            </a:extLst>
-          </p:cNvPr>
-          <p:cNvSpPr>
-            <a:spLocks noGrp="1"/>
-          </p:cNvSpPr>
-          <p:nvPr/>
-        </p:nvSpPr>
-        <p:spPr>
-          <a:xfrm>
-            <a:off x="1571625" y="3981450"/>
-            <a:ext cx="6762750" cy="457200"/>
-          </a:xfrm>
-          <a:prstGeom prst="rect">
-            <a:avLst/>
-          </a:prstGeom>
-          <a:noFill/>
-          <a:ln w="0">
-            <a:noFill/>
-          </a:ln>
-        </p:spPr>
-        <p:txBody>
-          <a:bodyPr lIns="38100" tIns="19050" rIns="38100" bIns="19050" anchor="ctr">
-            <a:normAutofit/>
-          </a:bodyPr>
-          <a:lstStyle/>
-          <a:p>
-            <a:pPr algn="l">
-              <a:defRPr sz="1425" b="0">
-                <a:solidFill>
-                  <a:srgbClr val="151515"/>
-                </a:solidFill>
-                <a:latin typeface="Inter"/>
-                <a:ea typeface="Inter"/>
-                <a:cs typeface="Inter"/>
-              </a:defRPr>
-            </a:pPr>
-            <a:r>
-              <a:rPr sz="1425" b="0">
-                <a:solidFill>
-                  <a:srgbClr val="151515"/>
-                </a:solidFill>
-                <a:latin typeface="Inter"/>
-                <a:ea typeface="Inter"/>
-                <a:cs typeface="Inter"/>
-              </a:rPr>
-              <a:t>Εφαρμογή εννοιών και σενάριο πολύωρης χρήσης</a:t>
-            </a:r>
-          </a:p>
-        </p:txBody>
-      </p:sp>
-      <p:pic>
-        <p:nvPicPr>
-          <p:cNvPr id="33" name="Picture 32"/>
-          <p:cNvPicPr>
-            <a:picLocks noChangeAspect="1"/>
-          </p:cNvPicPr>
-          <p:nvPr/>
-        </p:nvPicPr>
-        <p:blipFill>
-          <a:blip r:embed="rId3"/>
-          <a:stretch/>
-        </p:blipFill>
-        <p:spPr>
-          <a:xfrm>
-            <a:off x="8858250" y="3016483"/>
-            <a:ext cx="2095500" cy="539283"/>
-          </a:xfrm>
-          <a:prstGeom prst="rect">
-            <a:avLst/>
-          </a:prstGeom>
-        </p:spPr>
-      </p:pic>
-      <p:sp>
-        <p:nvSpPr>
-          <p:cNvPr id="17" name="Rectangle 16">
-            <a:extLst>
-              <a:ext uri="{FF2B5EF4-FFF2-40B4-BE49-F238E27FC236}">
-                <a16:creationId xmlns:a16="http://schemas.microsoft.com/office/drawing/2014/main" id="{15EAD259-1675-4347-9043-D3CDC6234A03}"/>
-              </a:ext>
-            </a:extLst>
-          </p:cNvPr>
-          <p:cNvSpPr>
-            <a:spLocks noGrp="1"/>
-          </p:cNvSpPr>
-          <p:nvPr/>
-        </p:nvSpPr>
-        <p:spPr>
-          <a:xfrm>
-            <a:off x="8572500" y="5191125"/>
-            <a:ext cx="2667000" cy="428625"/>
-          </a:xfrm>
-          <a:prstGeom prst="rect">
-            <a:avLst/>
-          </a:prstGeom>
-          <a:noFill/>
-          <a:ln w="0">
-            <a:noFill/>
-          </a:ln>
-        </p:spPr>
-        <p:txBody>
-          <a:bodyPr lIns="38100" tIns="19050" rIns="38100" bIns="19050" anchor="t">
-            <a:normAutofit/>
-          </a:bodyPr>
-          <a:lstStyle/>
-          <a:p>
-            <a:pPr algn="ctr">
-              <a:defRPr sz="1500" b="1">
-                <a:solidFill>
-                  <a:srgbClr val="5A58CB"/>
-                </a:solidFill>
-                <a:latin typeface="Inter"/>
-                <a:ea typeface="Inter"/>
-                <a:cs typeface="Inter"/>
-              </a:defRPr>
-            </a:pPr>
-            <a:r>
-              <a:rPr sz="1500" b="1">
-                <a:solidFill>
-                  <a:srgbClr val="5A58CB"/>
-                </a:solidFill>
-                <a:latin typeface="Inter"/>
-                <a:ea typeface="Inter"/>
-                <a:cs typeface="Inter"/>
-              </a:rPr>
-              <a:t>Σελίδες 149–153</a:t>
-            </a:r>
-          </a:p>
-        </p:txBody>
-      </p:sp>
-    </p:spTree>
-    <p:extLst>
-      <p:ext uri="{BB962C8B-B14F-4D97-AF65-F5344CB8AC3E}">
-        <p14:creationId xmlns:p14="http://schemas.microsoft.com/office/powerpoint/2010/main" val="1164157584"/>
       </p:ext>
     </p:extLst>
   </p:cSld>
